--- a/cse4001_pdc_t/PDC.pptx
+++ b/cse4001_pdc_t/PDC.pptx
@@ -2,26 +2,26 @@
 <file path=ppt/presentation.xml><?xml version="1.0" encoding="utf-8"?>
 <p:presentation xmlns:a="http://schemas.openxmlformats.org/drawingml/2006/main" xmlns:r="http://schemas.openxmlformats.org/officeDocument/2006/relationships" xmlns:p="http://schemas.openxmlformats.org/presentationml/2006/main" saveSubsetFonts="1">
   <p:sldMasterIdLst>
-    <p:sldMasterId id="2147483648" r:id="rId1"/>
+    <p:sldMasterId id="2147483648" r:id="rId4"/>
   </p:sldMasterIdLst>
   <p:notesMasterIdLst>
-    <p:notesMasterId r:id="rId16"/>
+    <p:notesMasterId r:id="rId19"/>
   </p:notesMasterIdLst>
   <p:sldIdLst>
-    <p:sldId id="256" r:id="rId2"/>
-    <p:sldId id="265" r:id="rId3"/>
-    <p:sldId id="267" r:id="rId4"/>
-    <p:sldId id="274" r:id="rId5"/>
-    <p:sldId id="264" r:id="rId6"/>
-    <p:sldId id="258" r:id="rId7"/>
-    <p:sldId id="257" r:id="rId8"/>
-    <p:sldId id="269" r:id="rId9"/>
-    <p:sldId id="270" r:id="rId10"/>
-    <p:sldId id="271" r:id="rId11"/>
-    <p:sldId id="273" r:id="rId12"/>
-    <p:sldId id="272" r:id="rId13"/>
-    <p:sldId id="275" r:id="rId14"/>
-    <p:sldId id="263" r:id="rId15"/>
+    <p:sldId id="256" r:id="rId5"/>
+    <p:sldId id="265" r:id="rId6"/>
+    <p:sldId id="267" r:id="rId7"/>
+    <p:sldId id="274" r:id="rId8"/>
+    <p:sldId id="264" r:id="rId9"/>
+    <p:sldId id="258" r:id="rId10"/>
+    <p:sldId id="257" r:id="rId11"/>
+    <p:sldId id="269" r:id="rId12"/>
+    <p:sldId id="270" r:id="rId13"/>
+    <p:sldId id="271" r:id="rId14"/>
+    <p:sldId id="273" r:id="rId15"/>
+    <p:sldId id="272" r:id="rId16"/>
+    <p:sldId id="275" r:id="rId17"/>
+    <p:sldId id="263" r:id="rId18"/>
   </p:sldIdLst>
   <p:sldSz cx="9144000" cy="6858000" type="screen4x3"/>
   <p:notesSz cx="6858000" cy="9144000"/>
@@ -120,7 +120,69 @@
       </a:defRPr>
     </a:lvl9pPr>
   </p:defaultTextStyle>
+  <p:extLst>
+    <p:ext uri="{EFAFB233-063F-42B5-8137-9DF3F51BA10A}">
+      <p15:sldGuideLst xmlns:p15="http://schemas.microsoft.com/office/powerpoint/2012/main">
+        <p15:guide id="1" orient="horz" pos="2160">
+          <p15:clr>
+            <a:srgbClr val="A4A3A4"/>
+          </p15:clr>
+        </p15:guide>
+        <p15:guide id="2" pos="2880">
+          <p15:clr>
+            <a:srgbClr val="A4A3A4"/>
+          </p15:clr>
+        </p15:guide>
+      </p15:sldGuideLst>
+    </p:ext>
+  </p:extLst>
 </p:presentation>
+</file>
+
+<file path=ppt/revisionInfo.xml><?xml version="1.0" encoding="utf-8"?>
+<p1510:revInfo xmlns:a="http://schemas.openxmlformats.org/drawingml/2006/main" xmlns:r="http://schemas.openxmlformats.org/officeDocument/2006/relationships" xmlns:p1510="http://schemas.microsoft.com/office/powerpoint/2015/10/main">
+  <p1510:revLst>
+    <p1510:client id="{32188A75-540C-483B-A7C5-090CF99C7E95}" v="1" dt="2022-08-18T15:43:32.797"/>
+    <p1510:client id="{C51C5D1A-C602-4EA8-B6D5-027EE5694439}" v="1" dt="2022-08-26T04:13:05.294"/>
+  </p1510:revLst>
+</p1510:revInfo>
+</file>
+
+<file path=ppt/changesInfos/changesInfo1.xml><?xml version="1.0" encoding="utf-8"?>
+<pc:chgInfo xmlns:a="http://schemas.openxmlformats.org/drawingml/2006/main" xmlns:r="http://schemas.openxmlformats.org/officeDocument/2006/relationships" xmlns:ac="http://schemas.microsoft.com/office/drawing/2013/main/command" xmlns:pc="http://schemas.microsoft.com/office/powerpoint/2013/main/command">
+  <pc:docChgLst>
+    <pc:chgData name="POULAMI BERA" userId="S::poulami.bera2020@vitstudent.ac.in::972d5bbc-ff95-4ca7-8b36-db887387691c" providerId="AD" clId="Web-{32188A75-540C-483B-A7C5-090CF99C7E95}"/>
+    <pc:docChg chg="addSld">
+      <pc:chgData name="POULAMI BERA" userId="S::poulami.bera2020@vitstudent.ac.in::972d5bbc-ff95-4ca7-8b36-db887387691c" providerId="AD" clId="Web-{32188A75-540C-483B-A7C5-090CF99C7E95}" dt="2022-08-18T15:43:32.797" v="0"/>
+      <pc:docMkLst>
+        <pc:docMk/>
+      </pc:docMkLst>
+      <pc:sldChg chg="new">
+        <pc:chgData name="POULAMI BERA" userId="S::poulami.bera2020@vitstudent.ac.in::972d5bbc-ff95-4ca7-8b36-db887387691c" providerId="AD" clId="Web-{32188A75-540C-483B-A7C5-090CF99C7E95}" dt="2022-08-18T15:43:32.797" v="0"/>
+        <pc:sldMkLst>
+          <pc:docMk/>
+          <pc:sldMk cId="3429310675" sldId="276"/>
+        </pc:sldMkLst>
+      </pc:sldChg>
+    </pc:docChg>
+  </pc:docChgLst>
+  <pc:docChgLst>
+    <pc:chgData name="KHUSHI MATTU" userId="S::khushi.mattu2020@vitstudent.ac.in::0fde6804-d55f-4c90-9962-7d9e4234a231" providerId="AD" clId="Web-{C51C5D1A-C602-4EA8-B6D5-027EE5694439}"/>
+    <pc:docChg chg="delSld">
+      <pc:chgData name="KHUSHI MATTU" userId="S::khushi.mattu2020@vitstudent.ac.in::0fde6804-d55f-4c90-9962-7d9e4234a231" providerId="AD" clId="Web-{C51C5D1A-C602-4EA8-B6D5-027EE5694439}" dt="2022-08-26T04:13:05.294" v="0"/>
+      <pc:docMkLst>
+        <pc:docMk/>
+      </pc:docMkLst>
+      <pc:sldChg chg="del">
+        <pc:chgData name="KHUSHI MATTU" userId="S::khushi.mattu2020@vitstudent.ac.in::0fde6804-d55f-4c90-9962-7d9e4234a231" providerId="AD" clId="Web-{C51C5D1A-C602-4EA8-B6D5-027EE5694439}" dt="2022-08-26T04:13:05.294" v="0"/>
+        <pc:sldMkLst>
+          <pc:docMk/>
+          <pc:sldMk cId="3429310675" sldId="276"/>
+        </pc:sldMkLst>
+      </pc:sldChg>
+    </pc:docChg>
+  </pc:docChgLst>
+</pc:chgInfo>
 </file>
 
 <file path=ppt/notesMasters/notesMaster1.xml><?xml version="1.0" encoding="utf-8"?>
@@ -206,7 +268,7 @@
             <a:fld id="{C5CE224E-F826-42DB-B9C1-4FD35A222BC0}" type="datetimeFigureOut">
               <a:rPr lang="en-US" smtClean="0"/>
               <a:pPr/>
-              <a:t>7/21/2022</a:t>
+              <a:t>8/25/2022</a:t>
             </a:fld>
             <a:endParaRPr lang="en-US"/>
           </a:p>
@@ -272,38 +334,37 @@
           <a:p>
             <a:pPr lvl="0"/>
             <a:r>
-              <a:rPr lang="en-US" smtClean="0"/>
+              <a:rPr lang="en-US"/>
               <a:t>Click to edit Master text styles</a:t>
             </a:r>
           </a:p>
           <a:p>
             <a:pPr lvl="1"/>
             <a:r>
-              <a:rPr lang="en-US" smtClean="0"/>
+              <a:rPr lang="en-US"/>
               <a:t>Second level</a:t>
             </a:r>
           </a:p>
           <a:p>
             <a:pPr lvl="2"/>
             <a:r>
-              <a:rPr lang="en-US" smtClean="0"/>
+              <a:rPr lang="en-US"/>
               <a:t>Third level</a:t>
             </a:r>
           </a:p>
           <a:p>
             <a:pPr lvl="3"/>
             <a:r>
-              <a:rPr lang="en-US" smtClean="0"/>
+              <a:rPr lang="en-US"/>
               <a:t>Fourth level</a:t>
             </a:r>
           </a:p>
           <a:p>
             <a:pPr lvl="4"/>
             <a:r>
-              <a:rPr lang="en-US" smtClean="0"/>
+              <a:rPr lang="en-US"/>
               <a:t>Fifth level</a:t>
             </a:r>
-            <a:endParaRPr lang="en-US"/>
           </a:p>
         </p:txBody>
       </p:sp>
@@ -597,10 +658,9 @@
           <a:lstStyle/>
           <a:p>
             <a:r>
-              <a:rPr lang="en-US" smtClean="0"/>
+              <a:rPr lang="en-US"/>
               <a:t>Click to edit Master title style</a:t>
             </a:r>
-            <a:endParaRPr lang="en-US"/>
           </a:p>
         </p:txBody>
       </p:sp>
@@ -716,10 +776,9 @@
           </a:lstStyle>
           <a:p>
             <a:r>
-              <a:rPr lang="en-US" smtClean="0"/>
+              <a:rPr lang="en-US"/>
               <a:t>Click to edit Master subtitle style</a:t>
             </a:r>
-            <a:endParaRPr lang="en-US"/>
           </a:p>
         </p:txBody>
       </p:sp>
@@ -741,7 +800,7 @@
             <a:fld id="{75429306-1564-46E4-90E2-8320F5DCACB8}" type="datetimeFigureOut">
               <a:rPr lang="en-US" smtClean="0"/>
               <a:pPr/>
-              <a:t>7/21/2022</a:t>
+              <a:t>8/25/2022</a:t>
             </a:fld>
             <a:endParaRPr lang="en-US"/>
           </a:p>
@@ -831,10 +890,9 @@
           <a:lstStyle/>
           <a:p>
             <a:r>
-              <a:rPr lang="en-US" smtClean="0"/>
+              <a:rPr lang="en-US"/>
               <a:t>Click to edit Master title style</a:t>
             </a:r>
-            <a:endParaRPr lang="en-US"/>
           </a:p>
         </p:txBody>
       </p:sp>
@@ -855,38 +913,37 @@
           <a:p>
             <a:pPr lvl="0"/>
             <a:r>
-              <a:rPr lang="en-US" smtClean="0"/>
+              <a:rPr lang="en-US"/>
               <a:t>Click to edit Master text styles</a:t>
             </a:r>
           </a:p>
           <a:p>
             <a:pPr lvl="1"/>
             <a:r>
-              <a:rPr lang="en-US" smtClean="0"/>
+              <a:rPr lang="en-US"/>
               <a:t>Second level</a:t>
             </a:r>
           </a:p>
           <a:p>
             <a:pPr lvl="2"/>
             <a:r>
-              <a:rPr lang="en-US" smtClean="0"/>
+              <a:rPr lang="en-US"/>
               <a:t>Third level</a:t>
             </a:r>
           </a:p>
           <a:p>
             <a:pPr lvl="3"/>
             <a:r>
-              <a:rPr lang="en-US" smtClean="0"/>
+              <a:rPr lang="en-US"/>
               <a:t>Fourth level</a:t>
             </a:r>
           </a:p>
           <a:p>
             <a:pPr lvl="4"/>
             <a:r>
-              <a:rPr lang="en-US" smtClean="0"/>
+              <a:rPr lang="en-US"/>
               <a:t>Fifth level</a:t>
             </a:r>
-            <a:endParaRPr lang="en-US"/>
           </a:p>
         </p:txBody>
       </p:sp>
@@ -908,7 +965,7 @@
             <a:fld id="{75429306-1564-46E4-90E2-8320F5DCACB8}" type="datetimeFigureOut">
               <a:rPr lang="en-US" smtClean="0"/>
               <a:pPr/>
-              <a:t>7/21/2022</a:t>
+              <a:t>8/25/2022</a:t>
             </a:fld>
             <a:endParaRPr lang="en-US"/>
           </a:p>
@@ -1003,10 +1060,9 @@
           <a:lstStyle/>
           <a:p>
             <a:r>
-              <a:rPr lang="en-US" smtClean="0"/>
+              <a:rPr lang="en-US"/>
               <a:t>Click to edit Master title style</a:t>
             </a:r>
-            <a:endParaRPr lang="en-US"/>
           </a:p>
         </p:txBody>
       </p:sp>
@@ -1032,38 +1088,37 @@
           <a:p>
             <a:pPr lvl="0"/>
             <a:r>
-              <a:rPr lang="en-US" smtClean="0"/>
+              <a:rPr lang="en-US"/>
               <a:t>Click to edit Master text styles</a:t>
             </a:r>
           </a:p>
           <a:p>
             <a:pPr lvl="1"/>
             <a:r>
-              <a:rPr lang="en-US" smtClean="0"/>
+              <a:rPr lang="en-US"/>
               <a:t>Second level</a:t>
             </a:r>
           </a:p>
           <a:p>
             <a:pPr lvl="2"/>
             <a:r>
-              <a:rPr lang="en-US" smtClean="0"/>
+              <a:rPr lang="en-US"/>
               <a:t>Third level</a:t>
             </a:r>
           </a:p>
           <a:p>
             <a:pPr lvl="3"/>
             <a:r>
-              <a:rPr lang="en-US" smtClean="0"/>
+              <a:rPr lang="en-US"/>
               <a:t>Fourth level</a:t>
             </a:r>
           </a:p>
           <a:p>
             <a:pPr lvl="4"/>
             <a:r>
-              <a:rPr lang="en-US" smtClean="0"/>
+              <a:rPr lang="en-US"/>
               <a:t>Fifth level</a:t>
             </a:r>
-            <a:endParaRPr lang="en-US"/>
           </a:p>
         </p:txBody>
       </p:sp>
@@ -1085,7 +1140,7 @@
             <a:fld id="{75429306-1564-46E4-90E2-8320F5DCACB8}" type="datetimeFigureOut">
               <a:rPr lang="en-US" smtClean="0"/>
               <a:pPr/>
-              <a:t>7/21/2022</a:t>
+              <a:t>8/25/2022</a:t>
             </a:fld>
             <a:endParaRPr lang="en-US"/>
           </a:p>
@@ -1175,10 +1230,9 @@
           <a:lstStyle/>
           <a:p>
             <a:r>
-              <a:rPr lang="en-US" smtClean="0"/>
+              <a:rPr lang="en-US"/>
               <a:t>Click to edit Master title style</a:t>
             </a:r>
-            <a:endParaRPr lang="en-US"/>
           </a:p>
         </p:txBody>
       </p:sp>
@@ -1199,38 +1253,37 @@
           <a:p>
             <a:pPr lvl="0"/>
             <a:r>
-              <a:rPr lang="en-US" smtClean="0"/>
+              <a:rPr lang="en-US"/>
               <a:t>Click to edit Master text styles</a:t>
             </a:r>
           </a:p>
           <a:p>
             <a:pPr lvl="1"/>
             <a:r>
-              <a:rPr lang="en-US" smtClean="0"/>
+              <a:rPr lang="en-US"/>
               <a:t>Second level</a:t>
             </a:r>
           </a:p>
           <a:p>
             <a:pPr lvl="2"/>
             <a:r>
-              <a:rPr lang="en-US" smtClean="0"/>
+              <a:rPr lang="en-US"/>
               <a:t>Third level</a:t>
             </a:r>
           </a:p>
           <a:p>
             <a:pPr lvl="3"/>
             <a:r>
-              <a:rPr lang="en-US" smtClean="0"/>
+              <a:rPr lang="en-US"/>
               <a:t>Fourth level</a:t>
             </a:r>
           </a:p>
           <a:p>
             <a:pPr lvl="4"/>
             <a:r>
-              <a:rPr lang="en-US" smtClean="0"/>
+              <a:rPr lang="en-US"/>
               <a:t>Fifth level</a:t>
             </a:r>
-            <a:endParaRPr lang="en-US"/>
           </a:p>
         </p:txBody>
       </p:sp>
@@ -1252,7 +1305,7 @@
             <a:fld id="{75429306-1564-46E4-90E2-8320F5DCACB8}" type="datetimeFigureOut">
               <a:rPr lang="en-US" smtClean="0"/>
               <a:pPr/>
-              <a:t>7/21/2022</a:t>
+              <a:t>8/25/2022</a:t>
             </a:fld>
             <a:endParaRPr lang="en-US"/>
           </a:p>
@@ -1351,10 +1404,9 @@
           </a:lstStyle>
           <a:p>
             <a:r>
-              <a:rPr lang="en-US" smtClean="0"/>
+              <a:rPr lang="en-US"/>
               <a:t>Click to edit Master title style</a:t>
             </a:r>
-            <a:endParaRPr lang="en-US"/>
           </a:p>
         </p:txBody>
       </p:sp>
@@ -1471,7 +1523,7 @@
           <a:p>
             <a:pPr lvl="0"/>
             <a:r>
-              <a:rPr lang="en-US" smtClean="0"/>
+              <a:rPr lang="en-US"/>
               <a:t>Click to edit Master text styles</a:t>
             </a:r>
           </a:p>
@@ -1495,7 +1547,7 @@
             <a:fld id="{75429306-1564-46E4-90E2-8320F5DCACB8}" type="datetimeFigureOut">
               <a:rPr lang="en-US" smtClean="0"/>
               <a:pPr/>
-              <a:t>7/21/2022</a:t>
+              <a:t>8/25/2022</a:t>
             </a:fld>
             <a:endParaRPr lang="en-US"/>
           </a:p>
@@ -1585,10 +1637,9 @@
           <a:lstStyle/>
           <a:p>
             <a:r>
-              <a:rPr lang="en-US" smtClean="0"/>
+              <a:rPr lang="en-US"/>
               <a:t>Click to edit Master title style</a:t>
             </a:r>
-            <a:endParaRPr lang="en-US"/>
           </a:p>
         </p:txBody>
       </p:sp>
@@ -1642,38 +1693,37 @@
           <a:p>
             <a:pPr lvl="0"/>
             <a:r>
-              <a:rPr lang="en-US" smtClean="0"/>
+              <a:rPr lang="en-US"/>
               <a:t>Click to edit Master text styles</a:t>
             </a:r>
           </a:p>
           <a:p>
             <a:pPr lvl="1"/>
             <a:r>
-              <a:rPr lang="en-US" smtClean="0"/>
+              <a:rPr lang="en-US"/>
               <a:t>Second level</a:t>
             </a:r>
           </a:p>
           <a:p>
             <a:pPr lvl="2"/>
             <a:r>
-              <a:rPr lang="en-US" smtClean="0"/>
+              <a:rPr lang="en-US"/>
               <a:t>Third level</a:t>
             </a:r>
           </a:p>
           <a:p>
             <a:pPr lvl="3"/>
             <a:r>
-              <a:rPr lang="en-US" smtClean="0"/>
+              <a:rPr lang="en-US"/>
               <a:t>Fourth level</a:t>
             </a:r>
           </a:p>
           <a:p>
             <a:pPr lvl="4"/>
             <a:r>
-              <a:rPr lang="en-US" smtClean="0"/>
+              <a:rPr lang="en-US"/>
               <a:t>Fifth level</a:t>
             </a:r>
-            <a:endParaRPr lang="en-US"/>
           </a:p>
         </p:txBody>
       </p:sp>
@@ -1727,38 +1777,37 @@
           <a:p>
             <a:pPr lvl="0"/>
             <a:r>
-              <a:rPr lang="en-US" smtClean="0"/>
+              <a:rPr lang="en-US"/>
               <a:t>Click to edit Master text styles</a:t>
             </a:r>
           </a:p>
           <a:p>
             <a:pPr lvl="1"/>
             <a:r>
-              <a:rPr lang="en-US" smtClean="0"/>
+              <a:rPr lang="en-US"/>
               <a:t>Second level</a:t>
             </a:r>
           </a:p>
           <a:p>
             <a:pPr lvl="2"/>
             <a:r>
-              <a:rPr lang="en-US" smtClean="0"/>
+              <a:rPr lang="en-US"/>
               <a:t>Third level</a:t>
             </a:r>
           </a:p>
           <a:p>
             <a:pPr lvl="3"/>
             <a:r>
-              <a:rPr lang="en-US" smtClean="0"/>
+              <a:rPr lang="en-US"/>
               <a:t>Fourth level</a:t>
             </a:r>
           </a:p>
           <a:p>
             <a:pPr lvl="4"/>
             <a:r>
-              <a:rPr lang="en-US" smtClean="0"/>
+              <a:rPr lang="en-US"/>
               <a:t>Fifth level</a:t>
             </a:r>
-            <a:endParaRPr lang="en-US"/>
           </a:p>
         </p:txBody>
       </p:sp>
@@ -1780,7 +1829,7 @@
             <a:fld id="{75429306-1564-46E4-90E2-8320F5DCACB8}" type="datetimeFigureOut">
               <a:rPr lang="en-US" smtClean="0"/>
               <a:pPr/>
-              <a:t>7/21/2022</a:t>
+              <a:t>8/25/2022</a:t>
             </a:fld>
             <a:endParaRPr lang="en-US"/>
           </a:p>
@@ -1874,10 +1923,9 @@
           </a:lstStyle>
           <a:p>
             <a:r>
-              <a:rPr lang="en-US" smtClean="0"/>
+              <a:rPr lang="en-US"/>
               <a:t>Click to edit Master title style</a:t>
             </a:r>
-            <a:endParaRPr lang="en-US"/>
           </a:p>
         </p:txBody>
       </p:sp>
@@ -1940,7 +1988,7 @@
           <a:p>
             <a:pPr lvl="0"/>
             <a:r>
-              <a:rPr lang="en-US" smtClean="0"/>
+              <a:rPr lang="en-US"/>
               <a:t>Click to edit Master text styles</a:t>
             </a:r>
           </a:p>
@@ -1996,38 +2044,37 @@
           <a:p>
             <a:pPr lvl="0"/>
             <a:r>
-              <a:rPr lang="en-US" smtClean="0"/>
+              <a:rPr lang="en-US"/>
               <a:t>Click to edit Master text styles</a:t>
             </a:r>
           </a:p>
           <a:p>
             <a:pPr lvl="1"/>
             <a:r>
-              <a:rPr lang="en-US" smtClean="0"/>
+              <a:rPr lang="en-US"/>
               <a:t>Second level</a:t>
             </a:r>
           </a:p>
           <a:p>
             <a:pPr lvl="2"/>
             <a:r>
-              <a:rPr lang="en-US" smtClean="0"/>
+              <a:rPr lang="en-US"/>
               <a:t>Third level</a:t>
             </a:r>
           </a:p>
           <a:p>
             <a:pPr lvl="3"/>
             <a:r>
-              <a:rPr lang="en-US" smtClean="0"/>
+              <a:rPr lang="en-US"/>
               <a:t>Fourth level</a:t>
             </a:r>
           </a:p>
           <a:p>
             <a:pPr lvl="4"/>
             <a:r>
-              <a:rPr lang="en-US" smtClean="0"/>
+              <a:rPr lang="en-US"/>
               <a:t>Fifth level</a:t>
             </a:r>
-            <a:endParaRPr lang="en-US"/>
           </a:p>
         </p:txBody>
       </p:sp>
@@ -2090,7 +2137,7 @@
           <a:p>
             <a:pPr lvl="0"/>
             <a:r>
-              <a:rPr lang="en-US" smtClean="0"/>
+              <a:rPr lang="en-US"/>
               <a:t>Click to edit Master text styles</a:t>
             </a:r>
           </a:p>
@@ -2146,38 +2193,37 @@
           <a:p>
             <a:pPr lvl="0"/>
             <a:r>
-              <a:rPr lang="en-US" smtClean="0"/>
+              <a:rPr lang="en-US"/>
               <a:t>Click to edit Master text styles</a:t>
             </a:r>
           </a:p>
           <a:p>
             <a:pPr lvl="1"/>
             <a:r>
-              <a:rPr lang="en-US" smtClean="0"/>
+              <a:rPr lang="en-US"/>
               <a:t>Second level</a:t>
             </a:r>
           </a:p>
           <a:p>
             <a:pPr lvl="2"/>
             <a:r>
-              <a:rPr lang="en-US" smtClean="0"/>
+              <a:rPr lang="en-US"/>
               <a:t>Third level</a:t>
             </a:r>
           </a:p>
           <a:p>
             <a:pPr lvl="3"/>
             <a:r>
-              <a:rPr lang="en-US" smtClean="0"/>
+              <a:rPr lang="en-US"/>
               <a:t>Fourth level</a:t>
             </a:r>
           </a:p>
           <a:p>
             <a:pPr lvl="4"/>
             <a:r>
-              <a:rPr lang="en-US" smtClean="0"/>
+              <a:rPr lang="en-US"/>
               <a:t>Fifth level</a:t>
             </a:r>
-            <a:endParaRPr lang="en-US"/>
           </a:p>
         </p:txBody>
       </p:sp>
@@ -2199,7 +2245,7 @@
             <a:fld id="{75429306-1564-46E4-90E2-8320F5DCACB8}" type="datetimeFigureOut">
               <a:rPr lang="en-US" smtClean="0"/>
               <a:pPr/>
-              <a:t>7/21/2022</a:t>
+              <a:t>8/25/2022</a:t>
             </a:fld>
             <a:endParaRPr lang="en-US"/>
           </a:p>
@@ -2289,10 +2335,9 @@
           <a:lstStyle/>
           <a:p>
             <a:r>
-              <a:rPr lang="en-US" smtClean="0"/>
+              <a:rPr lang="en-US"/>
               <a:t>Click to edit Master title style</a:t>
             </a:r>
-            <a:endParaRPr lang="en-US"/>
           </a:p>
         </p:txBody>
       </p:sp>
@@ -2314,7 +2359,7 @@
             <a:fld id="{75429306-1564-46E4-90E2-8320F5DCACB8}" type="datetimeFigureOut">
               <a:rPr lang="en-US" smtClean="0"/>
               <a:pPr/>
-              <a:t>7/21/2022</a:t>
+              <a:t>8/25/2022</a:t>
             </a:fld>
             <a:endParaRPr lang="en-US"/>
           </a:p>
@@ -2406,7 +2451,7 @@
             <a:fld id="{75429306-1564-46E4-90E2-8320F5DCACB8}" type="datetimeFigureOut">
               <a:rPr lang="en-US" smtClean="0"/>
               <a:pPr/>
-              <a:t>7/21/2022</a:t>
+              <a:t>8/25/2022</a:t>
             </a:fld>
             <a:endParaRPr lang="en-US"/>
           </a:p>
@@ -2505,10 +2550,9 @@
           </a:lstStyle>
           <a:p>
             <a:r>
-              <a:rPr lang="en-US" smtClean="0"/>
+              <a:rPr lang="en-US"/>
               <a:t>Click to edit Master title style</a:t>
             </a:r>
-            <a:endParaRPr lang="en-US"/>
           </a:p>
         </p:txBody>
       </p:sp>
@@ -2562,38 +2606,37 @@
           <a:p>
             <a:pPr lvl="0"/>
             <a:r>
-              <a:rPr lang="en-US" smtClean="0"/>
+              <a:rPr lang="en-US"/>
               <a:t>Click to edit Master text styles</a:t>
             </a:r>
           </a:p>
           <a:p>
             <a:pPr lvl="1"/>
             <a:r>
-              <a:rPr lang="en-US" smtClean="0"/>
+              <a:rPr lang="en-US"/>
               <a:t>Second level</a:t>
             </a:r>
           </a:p>
           <a:p>
             <a:pPr lvl="2"/>
             <a:r>
-              <a:rPr lang="en-US" smtClean="0"/>
+              <a:rPr lang="en-US"/>
               <a:t>Third level</a:t>
             </a:r>
           </a:p>
           <a:p>
             <a:pPr lvl="3"/>
             <a:r>
-              <a:rPr lang="en-US" smtClean="0"/>
+              <a:rPr lang="en-US"/>
               <a:t>Fourth level</a:t>
             </a:r>
           </a:p>
           <a:p>
             <a:pPr lvl="4"/>
             <a:r>
-              <a:rPr lang="en-US" smtClean="0"/>
+              <a:rPr lang="en-US"/>
               <a:t>Fifth level</a:t>
             </a:r>
-            <a:endParaRPr lang="en-US"/>
           </a:p>
         </p:txBody>
       </p:sp>
@@ -2656,7 +2699,7 @@
           <a:p>
             <a:pPr lvl="0"/>
             <a:r>
-              <a:rPr lang="en-US" smtClean="0"/>
+              <a:rPr lang="en-US"/>
               <a:t>Click to edit Master text styles</a:t>
             </a:r>
           </a:p>
@@ -2680,7 +2723,7 @@
             <a:fld id="{75429306-1564-46E4-90E2-8320F5DCACB8}" type="datetimeFigureOut">
               <a:rPr lang="en-US" smtClean="0"/>
               <a:pPr/>
-              <a:t>7/21/2022</a:t>
+              <a:t>8/25/2022</a:t>
             </a:fld>
             <a:endParaRPr lang="en-US"/>
           </a:p>
@@ -2779,10 +2822,9 @@
           </a:lstStyle>
           <a:p>
             <a:r>
-              <a:rPr lang="en-US" smtClean="0"/>
+              <a:rPr lang="en-US"/>
               <a:t>Click to edit Master title style</a:t>
             </a:r>
-            <a:endParaRPr lang="en-US"/>
           </a:p>
         </p:txBody>
       </p:sp>
@@ -2906,7 +2948,7 @@
           <a:p>
             <a:pPr lvl="0"/>
             <a:r>
-              <a:rPr lang="en-US" smtClean="0"/>
+              <a:rPr lang="en-US"/>
               <a:t>Click to edit Master text styles</a:t>
             </a:r>
           </a:p>
@@ -2930,7 +2972,7 @@
             <a:fld id="{75429306-1564-46E4-90E2-8320F5DCACB8}" type="datetimeFigureOut">
               <a:rPr lang="en-US" smtClean="0"/>
               <a:pPr/>
-              <a:t>7/21/2022</a:t>
+              <a:t>8/25/2022</a:t>
             </a:fld>
             <a:endParaRPr lang="en-US"/>
           </a:p>
@@ -3035,10 +3077,9 @@
           <a:lstStyle/>
           <a:p>
             <a:r>
-              <a:rPr lang="en-US" smtClean="0"/>
+              <a:rPr lang="en-US"/>
               <a:t>Click to edit Master title style</a:t>
             </a:r>
-            <a:endParaRPr lang="en-US"/>
           </a:p>
         </p:txBody>
       </p:sp>
@@ -3069,38 +3110,37 @@
           <a:p>
             <a:pPr lvl="0"/>
             <a:r>
-              <a:rPr lang="en-US" smtClean="0"/>
+              <a:rPr lang="en-US"/>
               <a:t>Click to edit Master text styles</a:t>
             </a:r>
           </a:p>
           <a:p>
             <a:pPr lvl="1"/>
             <a:r>
-              <a:rPr lang="en-US" smtClean="0"/>
+              <a:rPr lang="en-US"/>
               <a:t>Second level</a:t>
             </a:r>
           </a:p>
           <a:p>
             <a:pPr lvl="2"/>
             <a:r>
-              <a:rPr lang="en-US" smtClean="0"/>
+              <a:rPr lang="en-US"/>
               <a:t>Third level</a:t>
             </a:r>
           </a:p>
           <a:p>
             <a:pPr lvl="3"/>
             <a:r>
-              <a:rPr lang="en-US" smtClean="0"/>
+              <a:rPr lang="en-US"/>
               <a:t>Fourth level</a:t>
             </a:r>
           </a:p>
           <a:p>
             <a:pPr lvl="4"/>
             <a:r>
-              <a:rPr lang="en-US" smtClean="0"/>
+              <a:rPr lang="en-US"/>
               <a:t>Fifth level</a:t>
             </a:r>
-            <a:endParaRPr lang="en-US"/>
           </a:p>
         </p:txBody>
       </p:sp>
@@ -3140,7 +3180,7 @@
             <a:fld id="{75429306-1564-46E4-90E2-8320F5DCACB8}" type="datetimeFigureOut">
               <a:rPr lang="en-US" smtClean="0"/>
               <a:pPr/>
-              <a:t>7/21/2022</a:t>
+              <a:t>8/25/2022</a:t>
             </a:fld>
             <a:endParaRPr lang="en-US"/>
           </a:p>
@@ -3534,7 +3574,7 @@
           <a:lstStyle/>
           <a:p>
             <a:r>
-              <a:rPr lang="en-GB" b="1" dirty="0" smtClean="0">
+              <a:rPr lang="en-GB" b="1" dirty="0">
                 <a:solidFill>
                   <a:srgbClr val="00B050"/>
                 </a:solidFill>
@@ -3542,14 +3582,14 @@
               <a:t>CSE4001</a:t>
             </a:r>
             <a:br>
-              <a:rPr lang="en-GB" b="1" dirty="0" smtClean="0">
+              <a:rPr lang="en-GB" b="1" dirty="0">
                 <a:solidFill>
                   <a:srgbClr val="00B050"/>
                 </a:solidFill>
               </a:rPr>
             </a:br>
             <a:r>
-              <a:rPr lang="en-GB" b="1" dirty="0" smtClean="0">
+              <a:rPr lang="en-GB" b="1" dirty="0">
                 <a:solidFill>
                   <a:srgbClr val="0070C0"/>
                 </a:solidFill>
@@ -3557,7 +3597,7 @@
               <a:t> </a:t>
             </a:r>
             <a:r>
-              <a:rPr lang="en-GB" b="1" dirty="0" smtClean="0">
+              <a:rPr lang="en-GB" b="1" dirty="0">
                 <a:solidFill>
                   <a:schemeClr val="accent1">
                     <a:lumMod val="50000"/>
@@ -3600,7 +3640,7 @@
           <a:p>
             <a:pPr algn="r"/>
             <a:r>
-              <a:rPr lang="en-US" sz="2000" dirty="0" smtClean="0">
+              <a:rPr lang="en-US" sz="2000" dirty="0">
                 <a:solidFill>
                   <a:srgbClr val="119A06"/>
                 </a:solidFill>
@@ -3608,7 +3648,7 @@
               <a:t>				</a:t>
             </a:r>
             <a:r>
-              <a:rPr lang="en-US" sz="2000" b="1" dirty="0" smtClean="0">
+              <a:rPr lang="en-US" sz="2000" b="1" dirty="0">
                 <a:solidFill>
                   <a:srgbClr val="119A06"/>
                 </a:solidFill>
@@ -3621,7 +3661,7 @@
           <a:p>
             <a:pPr algn="r"/>
             <a:r>
-              <a:rPr lang="en-US" sz="2000" b="1" dirty="0" smtClean="0">
+              <a:rPr lang="en-US" sz="2000" b="1" dirty="0">
                 <a:solidFill>
                   <a:srgbClr val="119A06"/>
                 </a:solidFill>
@@ -3634,7 +3674,7 @@
           <a:p>
             <a:pPr algn="r"/>
             <a:r>
-              <a:rPr lang="en-US" sz="2000" b="1" i="1" dirty="0" smtClean="0">
+              <a:rPr lang="en-US" sz="2000" b="1" i="1" dirty="0">
                 <a:solidFill>
                   <a:srgbClr val="119A06"/>
                 </a:solidFill>
@@ -3643,13 +3683,6 @@
               </a:rPr>
               <a:t>	SCOPE</a:t>
             </a:r>
-            <a:endParaRPr lang="en-US" sz="2000" b="1" i="1" dirty="0">
-              <a:solidFill>
-                <a:srgbClr val="119A06"/>
-              </a:solidFill>
-              <a:latin typeface="Aparajita" pitchFamily="34" charset="0"/>
-              <a:cs typeface="Aparajita" pitchFamily="34" charset="0"/>
-            </a:endParaRPr>
           </a:p>
         </p:txBody>
       </p:sp>
@@ -3658,13 +3691,6 @@
   <p:clrMapOvr>
     <a:masterClrMapping/>
   </p:clrMapOvr>
-  <p:timing>
-    <p:tnLst>
-      <p:par>
-        <p:cTn id="1" dur="indefinite" restart="never" nodeType="tmRoot"/>
-      </p:par>
-    </p:tnLst>
-  </p:timing>
 </p:sld>
 </file>
 
@@ -3740,15 +3766,7 @@
             </a:pPr>
             <a:r>
               <a:rPr lang="en-US" sz="2800" dirty="0"/>
-              <a:t>Time and Global States – Synchronizing physical clocks - Logical time and logical clock - Coordination </a:t>
-            </a:r>
-            <a:r>
-              <a:rPr lang="en-US" sz="2800" dirty="0" smtClean="0"/>
-              <a:t>and Agreement- </a:t>
-            </a:r>
-            <a:r>
-              <a:rPr lang="en-US" sz="2800" dirty="0"/>
-              <a:t>Distributed Mutual Exclusion, Election algorithms - Consensus and Related problems.</a:t>
+              <a:t>Time and Global States – Synchronizing physical clocks - Logical time and logical clock - Coordination and Agreement- Distributed Mutual Exclusion, Election algorithms - Consensus and Related problems.</a:t>
             </a:r>
             <a:endParaRPr lang="en-US" sz="2800" dirty="0">
               <a:latin typeface="Arial Narrow" pitchFamily="34" charset="0"/>
@@ -3766,13 +3784,6 @@
   <p:clrMapOvr>
     <a:masterClrMapping/>
   </p:clrMapOvr>
-  <p:timing>
-    <p:tnLst>
-      <p:par>
-        <p:cTn id="1" dur="indefinite" restart="never" nodeType="tmRoot"/>
-      </p:par>
-    </p:tnLst>
-  </p:timing>
 </p:sld>
 </file>
 
@@ -3848,28 +3859,16 @@
             </a:pPr>
             <a:r>
               <a:rPr lang="en-US" sz="2800" dirty="0"/>
-              <a:t>Transaction And Concurrency Control- Nested Transactions- Locks - Optimistic Concurrency Control- </a:t>
-            </a:r>
-            <a:r>
-              <a:rPr lang="en-US" sz="2800" dirty="0" smtClean="0"/>
-              <a:t>Timestamp Ordering</a:t>
-            </a:r>
+              <a:t>Transaction And Concurrency Control- Nested Transactions- Locks - Optimistic Concurrency Control- Timestamp Ordering </a:t>
+            </a:r>
+          </a:p>
+          <a:p>
+            <a:pPr marL="0" indent="0">
+              <a:buNone/>
+            </a:pPr>
             <a:r>
               <a:rPr lang="en-US" sz="2800" dirty="0"/>
-              <a:t> </a:t>
-            </a:r>
-          </a:p>
-          <a:p>
-            <a:pPr marL="0" indent="0">
-              <a:buNone/>
-            </a:pPr>
-            <a:r>
-              <a:rPr lang="en-US" sz="2800" dirty="0"/>
-              <a:t>Distributed Transactions- Flat and Nested, Atomic, Two phase Commit </a:t>
-            </a:r>
-            <a:r>
-              <a:rPr lang="en-US" sz="2800" dirty="0" smtClean="0"/>
-              <a:t>protocol</a:t>
+              <a:t>Distributed Transactions- Flat and Nested, Atomic, Two phase Commit protocol</a:t>
             </a:r>
             <a:endParaRPr lang="en-US" sz="2800" dirty="0">
               <a:latin typeface="Arial Narrow" pitchFamily="34" charset="0"/>
@@ -3887,13 +3886,6 @@
   <p:clrMapOvr>
     <a:masterClrMapping/>
   </p:clrMapOvr>
-  <p:timing>
-    <p:tnLst>
-      <p:par>
-        <p:cTn id="1" dur="indefinite" restart="never" nodeType="tmRoot"/>
-      </p:par>
-    </p:tnLst>
-  </p:timing>
 </p:sld>
 </file>
 
@@ -3969,13 +3961,8 @@
             </a:pPr>
             <a:r>
               <a:rPr lang="en-US" sz="2800" dirty="0"/>
-              <a:t>Distributed File System: Architecture – Processes </a:t>
-            </a:r>
-            <a:r>
-              <a:rPr lang="en-US" sz="2800" dirty="0" smtClean="0"/>
-              <a:t>– Communication </a:t>
-            </a:r>
-            <a:endParaRPr lang="en-US" sz="2800" dirty="0"/>
+              <a:t>Distributed File System: Architecture – Processes – Communication </a:t>
+            </a:r>
           </a:p>
           <a:p>
             <a:pPr marL="0" indent="0">
@@ -3983,19 +3970,7 @@
             </a:pPr>
             <a:r>
               <a:rPr lang="en-US" sz="2800" dirty="0"/>
-              <a:t>Distributed Web-based System: Architecture – </a:t>
-            </a:r>
-            <a:r>
-              <a:rPr lang="en-US" sz="2800" dirty="0" smtClean="0"/>
-              <a:t> </a:t>
-            </a:r>
-            <a:r>
-              <a:rPr lang="en-US" sz="2800" dirty="0"/>
-              <a:t>Overview of Distributed </a:t>
-            </a:r>
-            <a:r>
-              <a:rPr lang="en-US" sz="2800" dirty="0" smtClean="0"/>
-              <a:t>Computing Platforms</a:t>
+              <a:t>Distributed Web-based System: Architecture –  Overview of Distributed Computing Platforms</a:t>
             </a:r>
             <a:endParaRPr lang="en-US" sz="2800" dirty="0">
               <a:latin typeface="Arial Narrow" pitchFamily="34" charset="0"/>
@@ -4013,13 +3988,6 @@
   <p:clrMapOvr>
     <a:masterClrMapping/>
   </p:clrMapOvr>
-  <p:timing>
-    <p:tnLst>
-      <p:par>
-        <p:cTn id="1" dur="indefinite" restart="never" nodeType="tmRoot"/>
-      </p:par>
-    </p:tnLst>
-  </p:timing>
 </p:sld>
 </file>
 
@@ -4058,20 +4026,12 @@
           <a:lstStyle/>
           <a:p>
             <a:r>
-              <a:rPr lang="en-US" dirty="0" smtClean="0">
-                <a:solidFill>
-                  <a:srgbClr val="00B050"/>
-                </a:solidFill>
-              </a:rPr>
-              <a:t>Module-8 :  </a:t>
-            </a:r>
-            <a:r>
               <a:rPr lang="en-US" dirty="0">
                 <a:solidFill>
                   <a:srgbClr val="00B050"/>
                 </a:solidFill>
               </a:rPr>
-              <a:t>Recent Trends 	</a:t>
+              <a:t>Module-8 :  Recent Trends 	</a:t>
             </a:r>
             <a:br>
               <a:rPr lang="en-US" dirty="0">
@@ -4160,18 +4120,13 @@
           <a:lstStyle/>
           <a:p>
             <a:r>
-              <a:rPr lang="en-US" sz="3200" b="1" dirty="0" smtClean="0">
+              <a:rPr lang="en-US" sz="3200" b="1" dirty="0">
                 <a:solidFill>
                   <a:srgbClr val="7030A0"/>
                 </a:solidFill>
               </a:rPr>
               <a:t>Text/References Books</a:t>
             </a:r>
-            <a:endParaRPr lang="en-US" sz="3200" b="1" dirty="0">
-              <a:solidFill>
-                <a:srgbClr val="7030A0"/>
-              </a:solidFill>
-            </a:endParaRPr>
           </a:p>
         </p:txBody>
       </p:sp>
@@ -4198,7 +4153,7 @@
           <a:lstStyle/>
           <a:p>
             <a:r>
-              <a:rPr lang="en-US" sz="2400" dirty="0" err="1" smtClean="0"/>
+              <a:rPr lang="en-US" sz="2400" dirty="0" err="1"/>
               <a:t>Grama</a:t>
             </a:r>
             <a:r>
@@ -4210,44 +4165,28 @@
               <a:t>AddisonWesley</a:t>
             </a:r>
             <a:r>
-              <a:rPr lang="en-US" sz="2400" dirty="0" smtClean="0"/>
-              <a:t>.</a:t>
-            </a:r>
-          </a:p>
-          <a:p>
-            <a:r>
-              <a:rPr lang="en-US" sz="2400" dirty="0" err="1" smtClean="0"/>
-              <a:t>Coulouris</a:t>
-            </a:r>
-            <a:r>
-              <a:rPr lang="en-US" sz="2400" dirty="0"/>
-              <a:t>, G. (2012). Distributed systems. Boston: </a:t>
-            </a:r>
-            <a:r>
-              <a:rPr lang="en-US" sz="2400" dirty="0" smtClean="0"/>
-              <a:t>Addison-Wesley.</a:t>
-            </a:r>
-          </a:p>
-          <a:p>
-            <a:r>
-              <a:rPr lang="en-US" sz="2400" dirty="0" smtClean="0"/>
-              <a:t>Hwang</a:t>
-            </a:r>
-            <a:r>
-              <a:rPr lang="en-US" sz="2400" dirty="0"/>
-              <a:t>, K., &amp; Briggs, F. (1990). Computer Architecture and Parallel Processing (1st ed.). New York: </a:t>
-            </a:r>
-            <a:r>
-              <a:rPr lang="en-US" sz="2400" dirty="0" smtClean="0"/>
-              <a:t>McGraw- Hill</a:t>
-            </a:r>
-            <a:r>
               <a:rPr lang="en-US" sz="2400" dirty="0"/>
               <a:t>.</a:t>
             </a:r>
           </a:p>
           <a:p>
             <a:r>
+              <a:rPr lang="en-US" sz="2400" dirty="0" err="1"/>
+              <a:t>Coulouris</a:t>
+            </a:r>
+            <a:r>
+              <a:rPr lang="en-US" sz="2400" dirty="0"/>
+              <a:t>, G. (2012). Distributed systems. Boston: Addison-Wesley.</a:t>
+            </a:r>
+          </a:p>
+          <a:p>
+            <a:r>
+              <a:rPr lang="en-US" sz="2400" dirty="0"/>
+              <a:t>Hwang, K., &amp; Briggs, F. (1990). Computer Architecture and Parallel Processing (1st ed.). New York: McGraw- Hill.</a:t>
+            </a:r>
+          </a:p>
+          <a:p>
+            <a:r>
               <a:rPr lang="en-US" sz="2400" dirty="0"/>
               <a:t>Hager, G. (2017). Introduction To high performance computing for scientists and engineers: CRC press.</a:t>
             </a:r>
@@ -4258,7 +4197,7 @@
               <a:t>Tanenbaum, A. (2007). Distributed Systems: Principles and Paradigms (2nd ed.). </a:t>
             </a:r>
             <a:r>
-              <a:rPr lang="en-US" sz="2400" smtClean="0"/>
+              <a:rPr lang="en-US" sz="2400"/>
               <a:t>Pearson</a:t>
             </a:r>
             <a:endParaRPr lang="en-US" sz="2400" dirty="0">
@@ -4272,13 +4211,6 @@
   <p:clrMapOvr>
     <a:masterClrMapping/>
   </p:clrMapOvr>
-  <p:timing>
-    <p:tnLst>
-      <p:par>
-        <p:cTn id="1" dur="indefinite" restart="never" nodeType="tmRoot"/>
-      </p:par>
-    </p:tnLst>
-  </p:timing>
 </p:sld>
 </file>
 
@@ -4315,18 +4247,13 @@
           <a:lstStyle/>
           <a:p>
             <a:r>
-              <a:rPr lang="en-US" dirty="0" smtClean="0">
+              <a:rPr lang="en-US" dirty="0">
                 <a:solidFill>
                   <a:srgbClr val="00B050"/>
                 </a:solidFill>
               </a:rPr>
               <a:t>        General Information </a:t>
             </a:r>
-            <a:endParaRPr lang="en-US" dirty="0">
-              <a:solidFill>
-                <a:srgbClr val="00B050"/>
-              </a:solidFill>
-            </a:endParaRPr>
           </a:p>
         </p:txBody>
       </p:sp>
@@ -4348,48 +4275,44 @@
           <a:lstStyle/>
           <a:p>
             <a:r>
-              <a:rPr lang="en-US" dirty="0" smtClean="0"/>
+              <a:rPr lang="en-US" dirty="0"/>
               <a:t>E-mail: </a:t>
             </a:r>
             <a:r>
-              <a:rPr lang="en-US" dirty="0" smtClean="0">
+              <a:rPr lang="en-US" dirty="0">
                 <a:hlinkClick r:id="rId2"/>
               </a:rPr>
               <a:t>kumar.rangasamy@vit.ac.in</a:t>
             </a:r>
-            <a:endParaRPr lang="en-US" dirty="0" smtClean="0"/>
-          </a:p>
-          <a:p>
-            <a:r>
-              <a:rPr lang="en-US" dirty="0" smtClean="0"/>
-              <a:t>Slot </a:t>
-            </a:r>
-            <a:r>
-              <a:rPr lang="en-US" dirty="0" smtClean="0"/>
-              <a:t>:D2</a:t>
-            </a:r>
-          </a:p>
-          <a:p>
-            <a:r>
-              <a:rPr lang="en-US" dirty="0" smtClean="0"/>
+            <a:endParaRPr lang="en-US" dirty="0"/>
+          </a:p>
+          <a:p>
+            <a:r>
+              <a:rPr lang="en-US" dirty="0"/>
+              <a:t>Slot :D2</a:t>
+            </a:r>
+          </a:p>
+          <a:p>
+            <a:r>
+              <a:rPr lang="en-US" dirty="0"/>
               <a:t>Venue : DB-105</a:t>
             </a:r>
           </a:p>
           <a:p>
             <a:r>
-              <a:rPr lang="en-US" dirty="0" smtClean="0"/>
+              <a:rPr lang="en-US" dirty="0"/>
               <a:t>Office : AB1-614</a:t>
             </a:r>
           </a:p>
           <a:p>
-            <a:endParaRPr lang="en-US" dirty="0" smtClean="0"/>
+            <a:endParaRPr lang="en-US" dirty="0"/>
           </a:p>
           <a:p>
             <a:pPr>
               <a:buNone/>
             </a:pPr>
             <a:r>
-              <a:rPr lang="en-US" dirty="0" smtClean="0"/>
+              <a:rPr lang="en-US" dirty="0"/>
               <a:t>	</a:t>
             </a:r>
           </a:p>
@@ -4403,13 +4326,6 @@
   <p:clrMapOvr>
     <a:masterClrMapping/>
   </p:clrMapOvr>
-  <p:timing>
-    <p:tnLst>
-      <p:par>
-        <p:cTn id="1" dur="indefinite" restart="never" nodeType="tmRoot"/>
-      </p:par>
-    </p:tnLst>
-  </p:timing>
 </p:sld>
 </file>
 
@@ -4446,18 +4362,13 @@
           <a:lstStyle/>
           <a:p>
             <a:r>
-              <a:rPr lang="en-US" dirty="0" smtClean="0">
+              <a:rPr lang="en-US" dirty="0">
                 <a:solidFill>
                   <a:srgbClr val="00B050"/>
                 </a:solidFill>
               </a:rPr>
               <a:t>Objectives</a:t>
             </a:r>
-            <a:endParaRPr lang="en-US" dirty="0">
-              <a:solidFill>
-                <a:srgbClr val="00B050"/>
-              </a:solidFill>
-            </a:endParaRPr>
           </a:p>
         </p:txBody>
       </p:sp>
@@ -4484,19 +4395,19 @@
           <a:lstStyle/>
           <a:p>
             <a:r>
-              <a:rPr lang="en-US" sz="2800" dirty="0" smtClean="0"/>
+              <a:rPr lang="en-US" sz="2800" dirty="0"/>
               <a:t>To introduce the fundamentals of parallel and distributed computing including parallel and distributed architectures and paradigms</a:t>
             </a:r>
           </a:p>
           <a:p>
             <a:r>
-              <a:rPr lang="en-US" sz="2800" dirty="0" smtClean="0"/>
+              <a:rPr lang="en-US" sz="2800" dirty="0"/>
               <a:t>To understand the technologies, system architecture, and communication architecture that propelled the growth of parallel and distributed computing systems</a:t>
             </a:r>
           </a:p>
           <a:p>
             <a:r>
-              <a:rPr lang="en-US" sz="2800" dirty="0" smtClean="0"/>
+              <a:rPr lang="en-US" sz="2800" dirty="0"/>
               <a:t>To develop and execute basic parallel and distributed application using basic programming models and tools</a:t>
             </a:r>
           </a:p>
@@ -4507,13 +4418,6 @@
   <p:clrMapOvr>
     <a:masterClrMapping/>
   </p:clrMapOvr>
-  <p:timing>
-    <p:tnLst>
-      <p:par>
-        <p:cTn id="1" dur="indefinite" restart="never" nodeType="tmRoot"/>
-      </p:par>
-    </p:tnLst>
-  </p:timing>
 </p:sld>
 </file>
 
@@ -4584,18 +4488,13 @@
               <a:t> </a:t>
             </a:r>
             <a:r>
-              <a:rPr lang="en-US" sz="3600" dirty="0" smtClean="0">
+              <a:rPr lang="en-US" sz="3600" dirty="0">
                 <a:solidFill>
                   <a:srgbClr val="00B050"/>
                 </a:solidFill>
               </a:rPr>
               <a:t>Outcome</a:t>
             </a:r>
-            <a:endParaRPr lang="en-US" sz="3600" dirty="0">
-              <a:solidFill>
-                <a:srgbClr val="00B050"/>
-              </a:solidFill>
-            </a:endParaRPr>
           </a:p>
         </p:txBody>
       </p:sp>
@@ -4652,15 +4551,7 @@
             <a:pPr lvl="0"/>
             <a:r>
               <a:rPr lang="en-US" sz="1800" dirty="0"/>
-              <a:t>Analyze the issues in synchronizing clocks in distributed systems apply suitable algorithms </a:t>
-            </a:r>
-            <a:r>
-              <a:rPr lang="en-US" sz="1800" dirty="0" smtClean="0"/>
-              <a:t>to solve </a:t>
-            </a:r>
-            <a:r>
-              <a:rPr lang="en-US" sz="1800" dirty="0"/>
-              <a:t>it effectively and examine how election algorithms can be implemented in a distributed system.</a:t>
+              <a:t>Analyze the issues in synchronizing clocks in distributed systems apply suitable algorithms to solve it effectively and examine how election algorithms can be implemented in a distributed system.</a:t>
             </a:r>
           </a:p>
           <a:p>
@@ -4702,13 +4593,6 @@
   <p:clrMapOvr>
     <a:masterClrMapping/>
   </p:clrMapOvr>
-  <p:timing>
-    <p:tnLst>
-      <p:par>
-        <p:cTn id="1" dur="indefinite" restart="never" nodeType="tmRoot"/>
-      </p:par>
-    </p:tnLst>
-  </p:timing>
 </p:sld>
 </file>
 
@@ -4747,18 +4631,13 @@
           <a:lstStyle/>
           <a:p>
             <a:r>
-              <a:rPr lang="en-US" sz="4800" dirty="0" smtClean="0">
+              <a:rPr lang="en-US" sz="4800" dirty="0">
                 <a:solidFill>
                   <a:srgbClr val="00B050"/>
                 </a:solidFill>
               </a:rPr>
               <a:t>Course Layout </a:t>
             </a:r>
-            <a:endParaRPr lang="en-US" sz="4800" dirty="0">
-              <a:solidFill>
-                <a:srgbClr val="00B050"/>
-              </a:solidFill>
-            </a:endParaRPr>
           </a:p>
         </p:txBody>
       </p:sp>
@@ -4793,13 +4672,6 @@
   <p:clrMapOvr>
     <a:masterClrMapping/>
   </p:clrMapOvr>
-  <p:timing>
-    <p:tnLst>
-      <p:par>
-        <p:cTn id="1" dur="indefinite" restart="never" nodeType="tmRoot"/>
-      </p:par>
-    </p:tnLst>
-  </p:timing>
 </p:sld>
 </file>
 
@@ -4850,16 +4722,8 @@
               </a:rPr>
               <a:t>Module-1 : Parallelism Fundamentals</a:t>
             </a:r>
-            <a:r>
-              <a:rPr lang="en-US" sz="3200" dirty="0" smtClean="0">
-                <a:solidFill>
-                  <a:srgbClr val="7030A0"/>
-                </a:solidFill>
-              </a:rPr>
-              <a:t/>
-            </a:r>
             <a:br>
-              <a:rPr lang="en-US" sz="3200" dirty="0" smtClean="0">
+              <a:rPr lang="en-US" sz="3200" dirty="0">
                 <a:solidFill>
                   <a:srgbClr val="7030A0"/>
                 </a:solidFill>
@@ -4899,22 +4763,9 @@
               <a:buNone/>
             </a:pPr>
             <a:r>
-              <a:rPr lang="en-US" sz="2800" dirty="0" smtClean="0"/>
-              <a:t>Motivation </a:t>
-            </a:r>
-            <a:r>
               <a:rPr lang="en-US" sz="2800" dirty="0"/>
-              <a:t>– Key Concepts - Challenges - Overview: Parallel computing, Flynn‘s Taxonomy, Multi-core Processors</a:t>
-            </a:r>
-            <a:r>
-              <a:rPr lang="en-US" sz="2800" dirty="0" smtClean="0"/>
-              <a:t>, Shared </a:t>
-            </a:r>
-            <a:r>
-              <a:rPr lang="en-US" sz="2800" dirty="0"/>
-              <a:t>vs Distributed memory.</a:t>
-            </a:r>
-            <a:endParaRPr lang="en-US" sz="2800" dirty="0" smtClean="0"/>
+              <a:t>Motivation – Key Concepts - Challenges - Overview: Parallel computing, Flynn‘s Taxonomy, Multi-core Processors, Shared vs Distributed memory.</a:t>
+            </a:r>
           </a:p>
         </p:txBody>
       </p:sp>
@@ -4923,13 +4774,6 @@
   <p:clrMapOvr>
     <a:masterClrMapping/>
   </p:clrMapOvr>
-  <p:timing>
-    <p:tnLst>
-      <p:par>
-        <p:cTn id="1" dur="indefinite" restart="never" nodeType="tmRoot"/>
-      </p:par>
-    </p:tnLst>
-  </p:timing>
 </p:sld>
 </file>
 
@@ -4968,28 +4812,12 @@
           <a:lstStyle/>
           <a:p>
             <a:r>
-              <a:rPr lang="en-US" sz="3200" dirty="0" smtClean="0">
-                <a:solidFill>
-                  <a:srgbClr val="00B050"/>
-                </a:solidFill>
-              </a:rPr>
-              <a:t>Module-2 </a:t>
-            </a:r>
-            <a:r>
               <a:rPr lang="en-US" sz="3200" dirty="0">
                 <a:solidFill>
                   <a:srgbClr val="00B050"/>
                 </a:solidFill>
               </a:rPr>
-              <a:t>: Parallelism </a:t>
-            </a:r>
-            <a:r>
-              <a:rPr lang="en-US" sz="3200" dirty="0" smtClean="0">
-                <a:solidFill>
-                  <a:srgbClr val="00B050"/>
-                </a:solidFill>
-              </a:rPr>
-              <a:t>Architectures </a:t>
+              <a:t>Module-2 : Parallelism Architectures </a:t>
             </a:r>
           </a:p>
         </p:txBody>
@@ -5020,12 +4848,8 @@
               <a:buNone/>
             </a:pPr>
             <a:r>
-              <a:rPr lang="en-US" sz="2800" dirty="0" smtClean="0"/>
-              <a:t>Introduction </a:t>
-            </a:r>
-            <a:r>
               <a:rPr lang="en-US" sz="2800" dirty="0"/>
-              <a:t>to </a:t>
+              <a:t>Introduction to </a:t>
             </a:r>
             <a:r>
               <a:rPr lang="en-US" sz="2800" dirty="0" err="1"/>
@@ -5033,15 +4857,7 @@
             </a:r>
             <a:r>
               <a:rPr lang="en-US" sz="2800" dirty="0"/>
-              <a:t> Programming - Instruction Level Support for Parallel Programming, SIMD – </a:t>
-            </a:r>
-            <a:r>
-              <a:rPr lang="en-US" sz="2800" dirty="0" smtClean="0"/>
-              <a:t>Vector Processing </a:t>
-            </a:r>
-            <a:r>
-              <a:rPr lang="en-US" sz="2800" dirty="0"/>
-              <a:t>- GPUs</a:t>
+              <a:t> Programming - Instruction Level Support for Parallel Programming, SIMD – Vector Processing - GPUs</a:t>
             </a:r>
             <a:endParaRPr lang="en-US" sz="2800" dirty="0">
               <a:latin typeface="Arial Narrow" pitchFamily="34" charset="0"/>
@@ -5054,13 +4870,6 @@
   <p:clrMapOvr>
     <a:masterClrMapping/>
   </p:clrMapOvr>
-  <p:timing>
-    <p:tnLst>
-      <p:par>
-        <p:cTn id="1" dur="indefinite" restart="never" nodeType="tmRoot"/>
-      </p:par>
-    </p:tnLst>
-  </p:timing>
 </p:sld>
 </file>
 
@@ -5136,15 +4945,7 @@
             </a:pPr>
             <a:r>
               <a:rPr lang="en-US" sz="2800" dirty="0"/>
-              <a:t>Preliminaries - Decomposition Techniques - Characteristics of Tasks and Interactions - Mapping techniques for </a:t>
-            </a:r>
-            <a:r>
-              <a:rPr lang="en-US" sz="2800" dirty="0" smtClean="0"/>
-              <a:t>Load balancing </a:t>
-            </a:r>
-            <a:r>
-              <a:rPr lang="en-US" sz="2800" dirty="0"/>
-              <a:t>- Parallel Algorithm Models.</a:t>
+              <a:t>Preliminaries - Decomposition Techniques - Characteristics of Tasks and Interactions - Mapping techniques for Load balancing - Parallel Algorithm Models.</a:t>
             </a:r>
             <a:endParaRPr lang="en-US" sz="2800" dirty="0">
               <a:latin typeface="Arial Narrow" pitchFamily="34" charset="0"/>
@@ -5162,13 +4963,6 @@
   <p:clrMapOvr>
     <a:masterClrMapping/>
   </p:clrMapOvr>
-  <p:timing>
-    <p:tnLst>
-      <p:par>
-        <p:cTn id="1" dur="indefinite" restart="never" nodeType="tmRoot"/>
-      </p:par>
-    </p:tnLst>
-  </p:timing>
 </p:sld>
 </file>
 
@@ -5244,23 +5038,7 @@
             </a:pPr>
             <a:r>
               <a:rPr lang="en-US" sz="2800" dirty="0"/>
-              <a:t>Introduction - Characterization of Distributed Systems - Distributed Shared Memory Approaches – </a:t>
-            </a:r>
-            <a:r>
-              <a:rPr lang="en-US" sz="2800" dirty="0" smtClean="0"/>
-              <a:t>Message Passing </a:t>
-            </a:r>
-            <a:r>
-              <a:rPr lang="en-US" sz="2800" dirty="0"/>
-              <a:t>- Programming Using the Message-Passing Paradigm - Group Communication - Case Study (RPC and </a:t>
-            </a:r>
-            <a:r>
-              <a:rPr lang="en-US" sz="2800" dirty="0" smtClean="0"/>
-              <a:t>Java RMI</a:t>
-            </a:r>
-            <a:r>
-              <a:rPr lang="en-US" sz="2800" dirty="0"/>
-              <a:t>)</a:t>
+              <a:t>Introduction - Characterization of Distributed Systems - Distributed Shared Memory Approaches – Message Passing - Programming Using the Message-Passing Paradigm - Group Communication - Case Study (RPC and Java RMI)</a:t>
             </a:r>
             <a:endParaRPr lang="en-US" sz="2800" dirty="0">
               <a:latin typeface="Arial Narrow" pitchFamily="34" charset="0"/>
@@ -5278,13 +5056,6 @@
   <p:clrMapOvr>
     <a:masterClrMapping/>
   </p:clrMapOvr>
-  <p:timing>
-    <p:tnLst>
-      <p:par>
-        <p:cTn id="1" dur="indefinite" restart="never" nodeType="tmRoot"/>
-      </p:par>
-    </p:tnLst>
-  </p:timing>
 </p:sld>
 </file>
 
@@ -5855,18 +5626,57 @@
 </file>
 
 <file path=customXml/item1.xml><?xml version="1.0" encoding="utf-8"?>
-<ct:contentTypeSchema xmlns:ct="http://schemas.microsoft.com/office/2006/metadata/contentType" xmlns:ma="http://schemas.microsoft.com/office/2006/metadata/properties/metaAttributes" ct:_="" ma:_="" ma:contentTypeName="Document" ma:contentTypeID="0x0101008D6C2FF4A65BCA4C98CA0E5FCE415DB2" ma:contentTypeVersion="0" ma:contentTypeDescription="Create a new document." ma:contentTypeScope="" ma:versionID="79920bdaaeea3276d5d5ed6d63be1c2b">
-  <xsd:schema xmlns:xsd="http://www.w3.org/2001/XMLSchema" xmlns:xs="http://www.w3.org/2001/XMLSchema" xmlns:p="http://schemas.microsoft.com/office/2006/metadata/properties" targetNamespace="http://schemas.microsoft.com/office/2006/metadata/properties" ma:root="true" ma:fieldsID="b34f15b030d40ffca33e4aeb8eb001f5">
+<?mso-contentType ?>
+<FormTemplates xmlns="http://schemas.microsoft.com/sharepoint/v3/contenttype/forms">
+  <Display>DocumentLibraryForm</Display>
+  <Edit>DocumentLibraryForm</Edit>
+  <New>DocumentLibraryForm</New>
+</FormTemplates>
+</file>
+
+<file path=customXml/item2.xml><?xml version="1.0" encoding="utf-8"?>
+<ct:contentTypeSchema xmlns:ct="http://schemas.microsoft.com/office/2006/metadata/contentType" xmlns:ma="http://schemas.microsoft.com/office/2006/metadata/properties/metaAttributes" ct:_="" ma:_="" ma:contentTypeName="Document" ma:contentTypeID="0x0101008D6C2FF4A65BCA4C98CA0E5FCE415DB2" ma:contentTypeVersion="4" ma:contentTypeDescription="Create a new document." ma:contentTypeScope="" ma:versionID="ea602aa29029d417b8d18c21af9ecdb0">
+  <xsd:schema xmlns:xsd="http://www.w3.org/2001/XMLSchema" xmlns:xs="http://www.w3.org/2001/XMLSchema" xmlns:p="http://schemas.microsoft.com/office/2006/metadata/properties" xmlns:ns2="58fe58fc-72d2-4402-86d5-224c40a3db1c" targetNamespace="http://schemas.microsoft.com/office/2006/metadata/properties" ma:root="true" ma:fieldsID="808c8ca2c768d626c28528b9d4e0bf56" ns2:_="">
+    <xsd:import namespace="58fe58fc-72d2-4402-86d5-224c40a3db1c"/>
     <xsd:element name="properties">
       <xsd:complexType>
         <xsd:sequence>
           <xsd:element name="documentManagement">
             <xsd:complexType>
-              <xsd:all/>
+              <xsd:all>
+                <xsd:element ref="ns2:MediaServiceMetadata" minOccurs="0"/>
+                <xsd:element ref="ns2:MediaServiceFastMetadata" minOccurs="0"/>
+                <xsd:element ref="ns2:MediaServiceDateTaken" minOccurs="0"/>
+                <xsd:element ref="ns2:MediaLengthInSeconds" minOccurs="0"/>
+              </xsd:all>
             </xsd:complexType>
           </xsd:element>
         </xsd:sequence>
       </xsd:complexType>
+    </xsd:element>
+  </xsd:schema>
+  <xsd:schema xmlns:xsd="http://www.w3.org/2001/XMLSchema" xmlns:xs="http://www.w3.org/2001/XMLSchema" xmlns:dms="http://schemas.microsoft.com/office/2006/documentManagement/types" xmlns:pc="http://schemas.microsoft.com/office/infopath/2007/PartnerControls" targetNamespace="58fe58fc-72d2-4402-86d5-224c40a3db1c" elementFormDefault="qualified">
+    <xsd:import namespace="http://schemas.microsoft.com/office/2006/documentManagement/types"/>
+    <xsd:import namespace="http://schemas.microsoft.com/office/infopath/2007/PartnerControls"/>
+    <xsd:element name="MediaServiceMetadata" ma:index="8" nillable="true" ma:displayName="MediaServiceMetadata" ma:hidden="true" ma:internalName="MediaServiceMetadata" ma:readOnly="true">
+      <xsd:simpleType>
+        <xsd:restriction base="dms:Note"/>
+      </xsd:simpleType>
+    </xsd:element>
+    <xsd:element name="MediaServiceFastMetadata" ma:index="9" nillable="true" ma:displayName="MediaServiceFastMetadata" ma:hidden="true" ma:internalName="MediaServiceFastMetadata" ma:readOnly="true">
+      <xsd:simpleType>
+        <xsd:restriction base="dms:Note"/>
+      </xsd:simpleType>
+    </xsd:element>
+    <xsd:element name="MediaServiceDateTaken" ma:index="10" nillable="true" ma:displayName="MediaServiceDateTaken" ma:hidden="true" ma:internalName="MediaServiceDateTaken" ma:readOnly="true">
+      <xsd:simpleType>
+        <xsd:restriction base="dms:Text"/>
+      </xsd:simpleType>
+    </xsd:element>
+    <xsd:element name="MediaLengthInSeconds" ma:index="11" nillable="true" ma:displayName="MediaLengthInSeconds" ma:hidden="true" ma:internalName="MediaLengthInSeconds" ma:readOnly="true">
+      <xsd:simpleType>
+        <xsd:restriction base="dms:Unknown"/>
+      </xsd:simpleType>
     </xsd:element>
   </xsd:schema>
   <xsd:schema xmlns="http://schemas.openxmlformats.org/package/2006/metadata/core-properties" xmlns:xsd="http://www.w3.org/2001/XMLSchema" xmlns:xsi="http://www.w3.org/2001/XMLSchema-instance" xmlns:dc="http://purl.org/dc/elements/1.1/" xmlns:dcterms="http://purl.org/dc/terms/" xmlns:odoc="http://schemas.microsoft.com/internal/obd" targetNamespace="http://schemas.openxmlformats.org/package/2006/metadata/core-properties" elementFormDefault="qualified" attributeFormDefault="unqualified" blockDefault="#all">
@@ -5968,19 +5778,43 @@
 </ct:contentTypeSchema>
 </file>
 
-<file path=customXml/item2.xml><?xml version="1.0" encoding="utf-8"?>
-<?mso-contentType ?>
-<FormTemplates xmlns="http://schemas.microsoft.com/sharepoint/v3/contenttype/forms">
-  <Display>DocumentLibraryForm</Display>
-  <Edit>DocumentLibraryForm</Edit>
-  <New>DocumentLibraryForm</New>
-</FormTemplates>
+<file path=customXml/item3.xml><?xml version="1.0" encoding="utf-8"?>
+<p:properties xmlns:p="http://schemas.microsoft.com/office/2006/metadata/properties" xmlns:xsi="http://www.w3.org/2001/XMLSchema-instance" xmlns:pc="http://schemas.microsoft.com/office/infopath/2007/PartnerControls">
+  <documentManagement/>
+</p:properties>
 </file>
 
 <file path=customXml/itemProps1.xml><?xml version="1.0" encoding="utf-8"?>
-<ds:datastoreItem xmlns:ds="http://schemas.openxmlformats.org/officeDocument/2006/customXml" ds:itemID="{2D947AFE-8C9D-4762-813F-283B18DC5D03}"/>
+<ds:datastoreItem xmlns:ds="http://schemas.openxmlformats.org/officeDocument/2006/customXml" ds:itemID="{DF1C6084-36DC-4DA3-955D-8557DBB92F29}">
+  <ds:schemaRefs>
+    <ds:schemaRef ds:uri="http://schemas.microsoft.com/sharepoint/v3/contenttype/forms"/>
+  </ds:schemaRefs>
+</ds:datastoreItem>
 </file>
 
 <file path=customXml/itemProps2.xml><?xml version="1.0" encoding="utf-8"?>
-<ds:datastoreItem xmlns:ds="http://schemas.openxmlformats.org/officeDocument/2006/customXml" ds:itemID="{DF1C6084-36DC-4DA3-955D-8557DBB92F29}"/>
+<ds:datastoreItem xmlns:ds="http://schemas.openxmlformats.org/officeDocument/2006/customXml" ds:itemID="{1F025BDD-3B45-4DBA-BE64-1A09CD24F3C6}">
+  <ds:schemaRefs>
+    <ds:schemaRef ds:uri="http://schemas.microsoft.com/office/2006/metadata/contentType"/>
+    <ds:schemaRef ds:uri="http://schemas.microsoft.com/office/2006/metadata/properties/metaAttributes"/>
+    <ds:schemaRef ds:uri="http://www.w3.org/2001/XMLSchema"/>
+    <ds:schemaRef ds:uri="http://schemas.microsoft.com/office/2006/metadata/properties"/>
+    <ds:schemaRef ds:uri="58fe58fc-72d2-4402-86d5-224c40a3db1c"/>
+    <ds:schemaRef ds:uri="http://schemas.microsoft.com/office/2006/documentManagement/types"/>
+    <ds:schemaRef ds:uri="http://schemas.microsoft.com/office/infopath/2007/PartnerControls"/>
+    <ds:schemaRef ds:uri="http://schemas.openxmlformats.org/package/2006/metadata/core-properties"/>
+    <ds:schemaRef ds:uri="http://purl.org/dc/elements/1.1/"/>
+    <ds:schemaRef ds:uri="http://purl.org/dc/terms/"/>
+    <ds:schemaRef ds:uri="http://schemas.microsoft.com/internal/obd"/>
+  </ds:schemaRefs>
+</ds:datastoreItem>
+</file>
+
+<file path=customXml/itemProps3.xml><?xml version="1.0" encoding="utf-8"?>
+<ds:datastoreItem xmlns:ds="http://schemas.openxmlformats.org/officeDocument/2006/customXml" ds:itemID="{A9544D96-EC1E-49A3-9A50-68FA60AF55A7}">
+  <ds:schemaRefs>
+    <ds:schemaRef ds:uri="http://schemas.microsoft.com/office/2006/metadata/properties"/>
+    <ds:schemaRef ds:uri="http://schemas.microsoft.com/office/infopath/2007/PartnerControls"/>
+  </ds:schemaRefs>
+</ds:datastoreItem>
 </file>